--- a/samples/office/presentation.pptx
+++ b/samples/office/presentation.pptx
@@ -273,7 +273,7 @@
                 </a:solidFill>
                 <a:latin typeface="Arial"/>
               </a:rPr>
-              <a:t>Everything Viewer</a:t>
+              <a:t>Peekbean</a:t>
             </a:r>
           </a:p>
         </p:txBody>
